--- a/test/generator/baseline/gen.rtf.to.pptx.pptx
+++ b/test/generator/baseline/gen.rtf.to.pptx.pptx
@@ -1806,8 +1806,8 @@
             <a:tbl>
               <a:tblPr firstRow="1"/>
               <a:tblGrid>
-                <a:gridCol w="2244436"/>
-                <a:gridCol w="5985164"/>
+                <a:gridCol w="2554014"/>
+                <a:gridCol w="5675586"/>
               </a:tblGrid>
               <a:tr h="3683000">
                 <a:tc>
@@ -1819,30 +1819,21 @@
                         <a:buNone/>
                       </a:pPr>
                       <a:r>
-                        <a:rPr lang="en-US" sz="1100" dirty="0">
-                          <a:latin typeface="Ubuntu"/>
-                        </a:rPr>
-                        <a:t>One</a:t>
+                        <a:rPr lang="en-US" sz="1200" dirty="0"/>
+                        <a:t>One
+Three	Two</a:t>
                       </a:r>
+                      <a:endParaRPr lang="en-US" sz="1200" dirty="0"/>
+                    </a:p>
+                    <a:p>
+                      <a:pPr>
+                        <a:buNone/>
+                      </a:pPr>
                       <a:r>
-                        <a:rPr lang="en-US" sz="1100" dirty="0">
-                          <a:latin typeface="Ubuntu"/>
-                        </a:rPr>
-                        <a:t>Three</a:t>
-                      </a:r>
-                      <a:r>
-                        <a:rPr lang="en-US" sz="1100" dirty="0">
-                          <a:latin typeface="Ubuntu"/>
-                        </a:rPr>
-                        <a:t>Two</a:t>
-                      </a:r>
-                      <a:r>
-                        <a:rPr lang="en-US" sz="1100" dirty="0">
-                          <a:latin typeface="Ubuntu"/>
-                        </a:rPr>
+                        <a:rPr lang="en-US" sz="1200" dirty="0"/>
                         <a:t>Four</a:t>
                       </a:r>
-                      <a:endParaRPr lang="en-US" sz="1100" dirty="0"/>
+                      <a:endParaRPr lang="en-US" sz="1200" dirty="0"/>
                     </a:p>
                   </a:txBody>
                   <a:tcPr>

--- a/test/generator/baseline/gen.rtf.to.pptx.pptx
+++ b/test/generator/baseline/gen.rtf.to.pptx.pptx
@@ -10544,9 +10544,14 @@
           <a:lstStyle/>
           <a:p>
             <a:pPr marL="228600" indent="-177800">
-              <a:buFont typeface="+mj-lt"/>
-              <a:buAutoNum type="arabicPeriod"/>
+              <a:buNone/>
             </a:pPr>
+            <a:r>
+              <a:rPr lang="en-US" sz="1200" dirty="0">
+                <a:latin typeface="Ubuntu"/>
+              </a:rPr>
+              <a:t>1.	</a:t>
+            </a:r>
             <a:r>
               <a:rPr lang="en-US" sz="1200" dirty="0">
                 <a:latin typeface="Ubuntu"/>
@@ -10557,9 +10562,14 @@
           </a:p>
           <a:p>
             <a:pPr marL="228600" indent="-177800">
-              <a:buFont typeface="+mj-lt"/>
-              <a:buAutoNum type="arabicPeriod"/>
+              <a:buNone/>
             </a:pPr>
+            <a:r>
+              <a:rPr lang="en-US" sz="1200" dirty="0">
+                <a:latin typeface="Ubuntu"/>
+              </a:rPr>
+              <a:t>2.	</a:t>
+            </a:r>
             <a:r>
               <a:rPr lang="en-US" sz="1200" dirty="0">
                 <a:latin typeface="Ubuntu"/>
@@ -10662,9 +10672,14 @@
           <a:lstStyle/>
           <a:p>
             <a:pPr marL="228600" indent="-177800">
-              <a:buFont typeface="+mj-lt"/>
-              <a:buAutoNum type="arabicPeriod"/>
+              <a:buNone/>
             </a:pPr>
+            <a:r>
+              <a:rPr lang="en-US" sz="1200" dirty="0">
+                <a:latin typeface="Ubuntu"/>
+              </a:rPr>
+              <a:t>1.	</a:t>
+            </a:r>
             <a:r>
               <a:rPr lang="en-US" sz="1200" dirty="0">
                 <a:latin typeface="Ubuntu"/>
@@ -10675,9 +10690,14 @@
           </a:p>
           <a:p>
             <a:pPr marL="457200" indent="-177800" lvl="1">
-              <a:buFont typeface="+mj-lt"/>
-              <a:buAutoNum type="arabicPeriod"/>
+              <a:buNone/>
             </a:pPr>
+            <a:r>
+              <a:rPr lang="en-US" sz="1200" dirty="0">
+                <a:latin typeface="Ubuntu"/>
+              </a:rPr>
+              <a:t>1.	</a:t>
+            </a:r>
             <a:r>
               <a:rPr lang="en-US" sz="1200" dirty="0">
                 <a:latin typeface="Ubuntu"/>
@@ -10688,9 +10708,14 @@
           </a:p>
           <a:p>
             <a:pPr marL="685800" indent="-177800" lvl="2">
-              <a:buFont typeface="+mj-lt"/>
-              <a:buAutoNum type="arabicPeriod"/>
+              <a:buNone/>
             </a:pPr>
+            <a:r>
+              <a:rPr lang="en-US" sz="1200" dirty="0">
+                <a:latin typeface="Ubuntu"/>
+              </a:rPr>
+              <a:t>1.	</a:t>
+            </a:r>
             <a:r>
               <a:rPr lang="en-US" sz="1200" dirty="0">
                 <a:latin typeface="Ubuntu"/>
@@ -10701,9 +10726,14 @@
           </a:p>
           <a:p>
             <a:pPr marL="685800" indent="-177800" lvl="2">
-              <a:buFont typeface="+mj-lt"/>
-              <a:buAutoNum type="arabicPeriod"/>
+              <a:buNone/>
             </a:pPr>
+            <a:r>
+              <a:rPr lang="en-US" sz="1200" dirty="0">
+                <a:latin typeface="Ubuntu"/>
+              </a:rPr>
+              <a:t>2.	</a:t>
+            </a:r>
             <a:r>
               <a:rPr lang="en-US" sz="1200" dirty="0">
                 <a:latin typeface="Ubuntu"/>
@@ -10714,9 +10744,14 @@
           </a:p>
           <a:p>
             <a:pPr marL="685800" indent="-177800" lvl="2">
-              <a:buFont typeface="+mj-lt"/>
-              <a:buAutoNum type="arabicPeriod"/>
+              <a:buNone/>
             </a:pPr>
+            <a:r>
+              <a:rPr lang="en-US" sz="1200" dirty="0">
+                <a:latin typeface="Ubuntu"/>
+              </a:rPr>
+              <a:t>3.	</a:t>
+            </a:r>
             <a:r>
               <a:rPr lang="en-US" sz="1200" dirty="0">
                 <a:latin typeface="Ubuntu"/>
@@ -10727,9 +10762,14 @@
           </a:p>
           <a:p>
             <a:pPr marL="228600" indent="-177800">
-              <a:buFont typeface="+mj-lt"/>
-              <a:buAutoNum type="arabicPeriod"/>
+              <a:buNone/>
             </a:pPr>
+            <a:r>
+              <a:rPr lang="en-US" sz="1200" dirty="0">
+                <a:latin typeface="Ubuntu"/>
+              </a:rPr>
+              <a:t>2.	</a:t>
+            </a:r>
             <a:r>
               <a:rPr lang="en-US" sz="1200" dirty="0">
                 <a:latin typeface="Ubuntu"/>
@@ -11309,9 +11349,14 @@
           <a:lstStyle/>
           <a:p>
             <a:pPr marL="228600" indent="-177800">
-              <a:buFont typeface="+mj-lt"/>
-              <a:buAutoNum type="arabicPeriod"/>
+              <a:buNone/>
             </a:pPr>
+            <a:r>
+              <a:rPr lang="en-US" sz="1200" dirty="0">
+                <a:latin typeface="Ubuntu"/>
+              </a:rPr>
+              <a:t>1.	</a:t>
+            </a:r>
             <a:r>
               <a:rPr lang="en-US" sz="1200" dirty="0">
                 <a:latin typeface="Ubuntu"/>
@@ -11322,9 +11367,14 @@
           </a:p>
           <a:p>
             <a:pPr marL="228600" indent="-177800">
-              <a:buFont typeface="+mj-lt"/>
-              <a:buAutoNum type="arabicPeriod"/>
+              <a:buNone/>
             </a:pPr>
+            <a:r>
+              <a:rPr lang="en-US" sz="1200" dirty="0">
+                <a:latin typeface="Ubuntu"/>
+              </a:rPr>
+              <a:t>2.	</a:t>
+            </a:r>
             <a:r>
               <a:rPr lang="en-US" sz="1200" dirty="0">
                 <a:latin typeface="Ubuntu"/>
@@ -11347,9 +11397,14 @@
           </a:p>
           <a:p>
             <a:pPr marL="228600" indent="-177800">
-              <a:buFont typeface="+mj-lt"/>
-              <a:buAutoNum type="arabicPeriod"/>
+              <a:buNone/>
             </a:pPr>
+            <a:r>
+              <a:rPr lang="en-US" sz="1200" dirty="0">
+                <a:latin typeface="Ubuntu"/>
+              </a:rPr>
+              <a:t>3.	</a:t>
+            </a:r>
             <a:r>
               <a:rPr lang="en-US" sz="1200" dirty="0">
                 <a:latin typeface="Ubuntu"/>
@@ -11360,9 +11415,14 @@
           </a:p>
           <a:p>
             <a:pPr marL="228600" indent="-177800">
-              <a:buFont typeface="+mj-lt"/>
-              <a:buAutoNum type="arabicPeriod"/>
+              <a:buNone/>
             </a:pPr>
+            <a:r>
+              <a:rPr lang="en-US" sz="1200" dirty="0">
+                <a:latin typeface="Ubuntu"/>
+              </a:rPr>
+              <a:t>4.	</a:t>
+            </a:r>
             <a:r>
               <a:rPr lang="en-US" sz="1200" dirty="0">
                 <a:latin typeface="Ubuntu"/>

--- a/test/generator/baseline/gen.rtf.to.pptx.pptx
+++ b/test/generator/baseline/gen.rtf.to.pptx.pptx
@@ -11524,7 +11524,13 @@
             </a:pPr>
             <a:r>
               <a:rPr lang="en-US" sz="1400" dirty="0"/>
-              <a:t>1. In paged media, footnotes are usually displayed at the bottom of the text. However, in ebooks, a better paradigm is to make them clickable endnotes that the user can browse at her pleasure. This conversion is handled automatically by calibre.</a:t>
+              <a:t>1. </a:t>
+            </a:r>
+            <a:r>
+              <a:rPr lang="en-US" sz="1400" dirty="0">
+                <a:latin typeface="Ubuntu"/>
+              </a:rPr>
+              <a:t>In paged media, footnotes are usually displayed at the bottom of the text. However, in ebooks, a better paradigm is to make them clickable endnotes that the user can browse at her pleasure. This conversion is handled automatically by calibre.</a:t>
             </a:r>
             <a:endParaRPr lang="en-US" sz="1400" dirty="0"/>
           </a:p>
@@ -11534,7 +11540,13 @@
             </a:pPr>
             <a:r>
               <a:rPr lang="en-US" sz="1400" dirty="0"/>
-              <a:t>2. Endnotes are typically used for longer notes, they remain endnotes when converted into ebook form, except that they have an additional backlink to make it easy to return to the current position after reading the note.</a:t>
+              <a:t>2. </a:t>
+            </a:r>
+            <a:r>
+              <a:rPr lang="en-US" sz="1400" dirty="0">
+                <a:latin typeface="Ubuntu"/>
+              </a:rPr>
+              <a:t>Endnotes are typically used for longer notes, they remain endnotes when converted into ebook form, except that they have an additional backlink to make it easy to return to the current position after reading the note.</a:t>
             </a:r>
             <a:endParaRPr lang="en-US" sz="1400" dirty="0"/>
           </a:p>
